--- a/day6/Day6_MiniZinc_Slides.pptx
+++ b/day6/Day6_MiniZinc_Slides.pptx
@@ -4297,7 +4297,7 @@
         <p:spPr>
           <a:xfrm>
             <a:off x="457200" y="2100000"/>
-            <a:ext cx="3800000" cy="1400000"/>
+            <a:ext cx="3800000" cy="1894200"/>
           </a:xfrm>
           <a:prstGeom prst="roundRect">
             <a:avLst>
@@ -4391,7 +4391,7 @@
         <p:spPr>
           <a:xfrm>
             <a:off x="4400000" y="2100000"/>
-            <a:ext cx="4401000" cy="1400000"/>
+            <a:ext cx="4401000" cy="1894200"/>
           </a:xfrm>
           <a:prstGeom prst="roundRect">
             <a:avLst>
@@ -4425,13 +4425,13 @@
               </a:rPr>
               <a:t>int: alpha = 5;</a:t>
             </a:r>
-            <a:endParaRPr lang="en-US"/>
-          </a:p>
-          <a:p>
-            <a:pPr marL="0" indent="0">
-              <a:buNone/>
-            </a:pPr>
-            <a:endParaRPr lang="en-US"/>
+            <a:endParaRPr lang="en-US" dirty="0"/>
+          </a:p>
+          <a:p>
+            <a:pPr marL="0" indent="0">
+              <a:buNone/>
+            </a:pPr>
+            <a:endParaRPr lang="en-US" dirty="0"/>
           </a:p>
           <a:p>
             <a:pPr marL="0" indent="0">
@@ -4448,7 +4448,7 @@
               </a:rPr>
               <a:t>var 0..N: disruption =</a:t>
             </a:r>
-            <a:endParaRPr lang="en-US"/>
+            <a:endParaRPr lang="en-US" dirty="0"/>
           </a:p>
           <a:p>
             <a:pPr marL="0" indent="0">
@@ -4465,7 +4465,7 @@
               </a:rPr>
               <a:t>  sum(j,t)(bool2int(</a:t>
             </a:r>
-            <a:endParaRPr lang="en-US"/>
+            <a:endParaRPr lang="en-US" dirty="0"/>
           </a:p>
           <a:p>
             <a:pPr marL="0" indent="0">
@@ -4482,7 +4482,7 @@
               </a:rPr>
               <a:t>    machine[j,t] != orig_machine[j,t]</a:t>
             </a:r>
-            <a:endParaRPr lang="en-US"/>
+            <a:endParaRPr lang="en-US" dirty="0"/>
           </a:p>
           <a:p>
             <a:pPr marL="0" indent="0">
@@ -4499,13 +4499,13 @@
               </a:rPr>
               <a:t>  ));</a:t>
             </a:r>
-            <a:endParaRPr lang="en-US"/>
-          </a:p>
-          <a:p>
-            <a:pPr marL="0" indent="0">
-              <a:buNone/>
-            </a:pPr>
-            <a:endParaRPr lang="en-US"/>
+            <a:endParaRPr lang="en-US" dirty="0"/>
+          </a:p>
+          <a:p>
+            <a:pPr marL="0" indent="0">
+              <a:buNone/>
+            </a:pPr>
+            <a:endParaRPr lang="en-US" dirty="0"/>
           </a:p>
           <a:p>
             <a:pPr marL="0" indent="0">
@@ -4522,7 +4522,7 @@
               </a:rPr>
               <a:t>solve minimize</a:t>
             </a:r>
-            <a:endParaRPr lang="en-US"/>
+            <a:endParaRPr lang="en-US" dirty="0"/>
           </a:p>
           <a:p>
             <a:pPr marL="0" indent="0">
@@ -4539,7 +4539,7 @@
               </a:rPr>
               <a:t>  makespan + alpha * disruption;</a:t>
             </a:r>
-            <a:endParaRPr lang="en-US"/>
+            <a:endParaRPr lang="en-US" dirty="0"/>
           </a:p>
         </p:txBody>
       </p:sp>
@@ -4551,7 +4551,7 @@
         </p:nvSpPr>
         <p:spPr>
           <a:xfrm>
-            <a:off x="457200" y="3650000"/>
+            <a:off x="457200" y="3994200"/>
             <a:ext cx="8229600" cy="320000"/>
           </a:xfrm>
           <a:prstGeom prst="rect">
@@ -4578,7 +4578,7 @@
               </a:rPr>
               <a:t>→ ลองรัน: day6/07_penalize_changes.mzn  |  ทดลองเปลี่ยน alpha = 0, 5, 50 แล้วเปรียบเทียบ</a:t>
             </a:r>
-            <a:endParaRPr lang="en-US"/>
+            <a:endParaRPr lang="en-US" dirty="0"/>
           </a:p>
         </p:txBody>
       </p:sp>
@@ -6480,7 +6480,7 @@
         <p:spPr>
           <a:xfrm>
             <a:off x="4400000" y="1400000"/>
-            <a:ext cx="4401000" cy="2000000"/>
+            <a:ext cx="4401000" cy="2390604"/>
           </a:xfrm>
           <a:prstGeom prst="roundRect">
             <a:avLst>
@@ -6514,7 +6514,7 @@
               </a:rPr>
               <a:t>%% Warm start: fix known part of solution</a:t>
             </a:r>
-            <a:endParaRPr lang="en-US"/>
+            <a:endParaRPr lang="en-US" dirty="0"/>
           </a:p>
           <a:p>
             <a:pPr marL="0" indent="0">
@@ -6531,13 +6531,13 @@
               </a:rPr>
               <a:t>%% ด้วย constraint ชั่วคราว</a:t>
             </a:r>
-            <a:endParaRPr lang="en-US"/>
-          </a:p>
-          <a:p>
-            <a:pPr marL="0" indent="0">
-              <a:buNone/>
-            </a:pPr>
-            <a:endParaRPr lang="en-US"/>
+            <a:endParaRPr lang="en-US" dirty="0"/>
+          </a:p>
+          <a:p>
+            <a:pPr marL="0" indent="0">
+              <a:buNone/>
+            </a:pPr>
+            <a:endParaRPr lang="en-US" dirty="0"/>
           </a:p>
           <a:p>
             <a:pPr marL="0" indent="0">
@@ -6554,7 +6554,7 @@
               </a:rPr>
               <a:t>constraint machine[OrderA, Cut] = M_A;</a:t>
             </a:r>
-            <a:endParaRPr lang="en-US"/>
+            <a:endParaRPr lang="en-US" dirty="0"/>
           </a:p>
           <a:p>
             <a:pPr marL="0" indent="0">
@@ -6571,7 +6571,7 @@
               </a:rPr>
               <a:t>constraint machine[OrderA, Weld]= M_C;</a:t>
             </a:r>
-            <a:endParaRPr lang="en-US"/>
+            <a:endParaRPr lang="en-US" dirty="0"/>
           </a:p>
           <a:p>
             <a:pPr marL="0" indent="0">
@@ -6588,13 +6588,13 @@
               </a:rPr>
               <a:t>constraint start[OrderA, Cut]   = 0;</a:t>
             </a:r>
-            <a:endParaRPr lang="en-US"/>
-          </a:p>
-          <a:p>
-            <a:pPr marL="0" indent="0">
-              <a:buNone/>
-            </a:pPr>
-            <a:endParaRPr lang="en-US"/>
+            <a:endParaRPr lang="en-US" dirty="0"/>
+          </a:p>
+          <a:p>
+            <a:pPr marL="0" indent="0">
+              <a:buNone/>
+            </a:pPr>
+            <a:endParaRPr lang="en-US" dirty="0"/>
           </a:p>
           <a:p>
             <a:pPr marL="0" indent="0">
@@ -6611,7 +6611,7 @@
               </a:rPr>
               <a:t>%% หรือใช้ search annotation:</a:t>
             </a:r>
-            <a:endParaRPr lang="en-US"/>
+            <a:endParaRPr lang="en-US" dirty="0"/>
           </a:p>
           <a:p>
             <a:pPr marL="0" indent="0">
@@ -6628,7 +6628,7 @@
               </a:rPr>
               <a:t>solve</a:t>
             </a:r>
-            <a:endParaRPr lang="en-US"/>
+            <a:endParaRPr lang="en-US" dirty="0"/>
           </a:p>
           <a:p>
             <a:pPr marL="0" indent="0">
@@ -6645,7 +6645,7 @@
               </a:rPr>
               <a:t>  :: int_search([machine[j,t]|j,t],</a:t>
             </a:r>
-            <a:endParaRPr lang="en-US"/>
+            <a:endParaRPr lang="en-US" dirty="0"/>
           </a:p>
           <a:p>
             <a:pPr marL="0" indent="0">
@@ -6662,7 +6662,7 @@
               </a:rPr>
               <a:t>     first_fail, indomain_median)</a:t>
             </a:r>
-            <a:endParaRPr lang="en-US"/>
+            <a:endParaRPr lang="en-US" dirty="0"/>
           </a:p>
           <a:p>
             <a:pPr marL="0" indent="0">
@@ -6679,7 +6679,7 @@
               </a:rPr>
               <a:t>  minimize makespan;</a:t>
             </a:r>
-            <a:endParaRPr lang="en-US"/>
+            <a:endParaRPr lang="en-US" dirty="0"/>
           </a:p>
         </p:txBody>
       </p:sp>
@@ -6691,7 +6691,7 @@
         </p:nvSpPr>
         <p:spPr>
           <a:xfrm>
-            <a:off x="457200" y="3560000"/>
+            <a:off x="457200" y="4043500"/>
             <a:ext cx="8229600" cy="500000"/>
           </a:xfrm>
           <a:prstGeom prst="roundRect">
@@ -6722,7 +6722,7 @@
               </a:rPr>
               <a:t>Gecode (default solver): ใช้ constraint fix บางส่วนเป็น hint</a:t>
             </a:r>
-            <a:endParaRPr lang="en-US"/>
+            <a:endParaRPr lang="en-US" dirty="0"/>
           </a:p>
           <a:p>
             <a:pPr marL="0" indent="0">
@@ -6739,7 +6739,7 @@
               </a:rPr>
               <a:t>OR-Tools / Gurobi / CPLEX มี API-level warm start ที่ทรงพลังกว่า</a:t>
             </a:r>
-            <a:endParaRPr lang="en-US"/>
+            <a:endParaRPr lang="en-US" dirty="0"/>
           </a:p>
         </p:txBody>
       </p:sp>
@@ -9749,7 +9749,7 @@
         </p:nvSpPr>
         <p:spPr>
           <a:xfrm>
-            <a:off x="457200" y="570000"/>
+            <a:off x="457200" y="461360"/>
             <a:ext cx="8229600" cy="600000"/>
           </a:xfrm>
           <a:prstGeom prst="rect">
@@ -9776,7 +9776,7 @@
               </a:rPr>
               <a:t>Code: อ่าน Excel → ส่งให้ MiniZinc</a:t>
             </a:r>
-            <a:endParaRPr lang="en-US"/>
+            <a:endParaRPr lang="en-US" dirty="0"/>
           </a:p>
         </p:txBody>
       </p:sp>
@@ -9827,8 +9827,8 @@
         </p:nvSpPr>
         <p:spPr>
           <a:xfrm>
-            <a:off x="457200" y="1550000"/>
-            <a:ext cx="3800000" cy="2350000"/>
+            <a:off x="457200" y="1549999"/>
+            <a:ext cx="3800000" cy="3512451"/>
           </a:xfrm>
           <a:prstGeom prst="roundRect">
             <a:avLst>
@@ -9862,7 +9862,7 @@
               </a:rPr>
               <a:t>import pandas as pd</a:t>
             </a:r>
-            <a:endParaRPr lang="en-US"/>
+            <a:endParaRPr lang="en-US" dirty="0"/>
           </a:p>
           <a:p>
             <a:pPr marL="0" indent="0">
@@ -9879,13 +9879,13 @@
               </a:rPr>
               <a:t>import minizinc</a:t>
             </a:r>
-            <a:endParaRPr lang="en-US"/>
-          </a:p>
-          <a:p>
-            <a:pPr marL="0" indent="0">
-              <a:buNone/>
-            </a:pPr>
-            <a:endParaRPr lang="en-US"/>
+            <a:endParaRPr lang="en-US" dirty="0"/>
+          </a:p>
+          <a:p>
+            <a:pPr marL="0" indent="0">
+              <a:buNone/>
+            </a:pPr>
+            <a:endParaRPr lang="en-US" dirty="0"/>
           </a:p>
           <a:p>
             <a:pPr marL="0" indent="0">
@@ -9902,7 +9902,7 @@
               </a:rPr>
               <a:t># อ่านข้อมูลจาก Excel</a:t>
             </a:r>
-            <a:endParaRPr lang="en-US"/>
+            <a:endParaRPr lang="en-US" dirty="0"/>
           </a:p>
           <a:p>
             <a:pPr marL="0" indent="0">
@@ -9919,7 +9919,7 @@
               </a:rPr>
               <a:t>df_j = pd.read_excel('capstone_data.xlsx',</a:t>
             </a:r>
-            <a:endParaRPr lang="en-US"/>
+            <a:endParaRPr lang="en-US" dirty="0"/>
           </a:p>
           <a:p>
             <a:pPr marL="0" indent="0">
@@ -9936,7 +9936,7 @@
               </a:rPr>
               <a:t>         sheet_name='orders')</a:t>
             </a:r>
-            <a:endParaRPr lang="en-US"/>
+            <a:endParaRPr lang="en-US" dirty="0"/>
           </a:p>
           <a:p>
             <a:pPr marL="0" indent="0">
@@ -9953,7 +9953,7 @@
               </a:rPr>
               <a:t>df_p = pd.read_excel('capstone_data.xlsx',</a:t>
             </a:r>
-            <a:endParaRPr lang="en-US"/>
+            <a:endParaRPr lang="en-US" dirty="0"/>
           </a:p>
           <a:p>
             <a:pPr marL="0" indent="0">
@@ -9970,13 +9970,13 @@
               </a:rPr>
               <a:t>         sheet_name='proc_times')</a:t>
             </a:r>
-            <a:endParaRPr lang="en-US"/>
-          </a:p>
-          <a:p>
-            <a:pPr marL="0" indent="0">
-              <a:buNone/>
-            </a:pPr>
-            <a:endParaRPr lang="en-US"/>
+            <a:endParaRPr lang="en-US" dirty="0"/>
+          </a:p>
+          <a:p>
+            <a:pPr marL="0" indent="0">
+              <a:buNone/>
+            </a:pPr>
+            <a:endParaRPr lang="en-US" dirty="0"/>
           </a:p>
           <a:p>
             <a:pPr marL="0" indent="0">
@@ -9993,13 +9993,13 @@
               </a:rPr>
               <a:t>n_job, n_task, n_machine = 4, 3, 3</a:t>
             </a:r>
-            <a:endParaRPr lang="en-US"/>
-          </a:p>
-          <a:p>
-            <a:pPr marL="0" indent="0">
-              <a:buNone/>
-            </a:pPr>
-            <a:endParaRPr lang="en-US"/>
+            <a:endParaRPr lang="en-US" dirty="0"/>
+          </a:p>
+          <a:p>
+            <a:pPr marL="0" indent="0">
+              <a:buNone/>
+            </a:pPr>
+            <a:endParaRPr lang="en-US" dirty="0"/>
           </a:p>
           <a:p>
             <a:pPr marL="0" indent="0">
@@ -10016,7 +10016,7 @@
               </a:rPr>
               <a:t># สร้าง dur[j,t,m] — flatten เป็น list</a:t>
             </a:r>
-            <a:endParaRPr lang="en-US"/>
+            <a:endParaRPr lang="en-US" dirty="0"/>
           </a:p>
           <a:p>
             <a:pPr marL="0" indent="0">
@@ -10033,7 +10033,7 @@
               </a:rPr>
               <a:t>dur_flat = []</a:t>
             </a:r>
-            <a:endParaRPr lang="en-US"/>
+            <a:endParaRPr lang="en-US" dirty="0"/>
           </a:p>
           <a:p>
             <a:pPr marL="0" indent="0">
@@ -10050,7 +10050,7 @@
               </a:rPr>
               <a:t>for j in range(1, n_job+1):</a:t>
             </a:r>
-            <a:endParaRPr lang="en-US"/>
+            <a:endParaRPr lang="en-US" dirty="0"/>
           </a:p>
           <a:p>
             <a:pPr marL="0" indent="0">
@@ -10067,7 +10067,7 @@
               </a:rPr>
               <a:t>  for t in range(1, n_task+1):</a:t>
             </a:r>
-            <a:endParaRPr lang="en-US"/>
+            <a:endParaRPr lang="en-US" dirty="0"/>
           </a:p>
           <a:p>
             <a:pPr marL="0" indent="0">
@@ -10084,7 +10084,7 @@
               </a:rPr>
               <a:t>    row = df_p[(df_p.JobID==j) &amp;</a:t>
             </a:r>
-            <a:endParaRPr lang="en-US"/>
+            <a:endParaRPr lang="en-US" dirty="0"/>
           </a:p>
           <a:p>
             <a:pPr marL="0" indent="0">
@@ -10101,7 +10101,7 @@
               </a:rPr>
               <a:t>            (df_p.TaskID==t)]</a:t>
             </a:r>
-            <a:endParaRPr lang="en-US"/>
+            <a:endParaRPr lang="en-US" dirty="0"/>
           </a:p>
           <a:p>
             <a:pPr marL="0" indent="0">
@@ -10118,7 +10118,7 @@
               </a:rPr>
               <a:t>    for m in ['M_A','M_B','M_C']:</a:t>
             </a:r>
-            <a:endParaRPr lang="en-US"/>
+            <a:endParaRPr lang="en-US" dirty="0"/>
           </a:p>
           <a:p>
             <a:pPr marL="0" indent="0">
@@ -10135,7 +10135,7 @@
               </a:rPr>
               <a:t>      dur_flat.append(int(row[m]))</a:t>
             </a:r>
-            <a:endParaRPr lang="en-US"/>
+            <a:endParaRPr lang="en-US" dirty="0"/>
           </a:p>
         </p:txBody>
       </p:sp>
@@ -10187,7 +10187,7 @@
         <p:spPr>
           <a:xfrm>
             <a:off x="4800000" y="1550000"/>
-            <a:ext cx="4000000" cy="2350000"/>
+            <a:ext cx="4000000" cy="3512450"/>
           </a:xfrm>
           <a:prstGeom prst="roundRect">
             <a:avLst>
@@ -10517,7 +10517,7 @@
         </p:nvSpPr>
         <p:spPr>
           <a:xfrm>
-            <a:off x="457200" y="4050000"/>
+            <a:off x="457200" y="890000"/>
             <a:ext cx="8229600" cy="360000"/>
           </a:xfrm>
           <a:prstGeom prst="roundRect">
@@ -10548,7 +10548,7 @@
               </a:rPr>
               <a:t>pip install minizinc pandas openpyxl matplotlib  </a:t>
             </a:r>
-            <a:endParaRPr lang="en-US"/>
+            <a:endParaRPr lang="en-US" dirty="0"/>
           </a:p>
           <a:p>
             <a:pPr marL="0" indent="0">
@@ -10565,7 +10565,7 @@
               </a:rPr>
               <a:t>MiniZinc ต้องติดตั้งแยก: https://www.minizinc.org/software.html</a:t>
             </a:r>
-            <a:endParaRPr lang="en-US"/>
+            <a:endParaRPr lang="en-US" dirty="0"/>
           </a:p>
         </p:txBody>
       </p:sp>
